--- a/report/Figures.pptx
+++ b/report/Figures.pptx
@@ -15,7 +15,7 @@
     <p:sldMasterId id="2147483668" r:id="rId11"/>
   </p:sldMasterIdLst>
   <p:notesMasterIdLst>
-    <p:notesMasterId r:id="rId21"/>
+    <p:notesMasterId r:id="rId22"/>
   </p:notesMasterIdLst>
   <p:sldIdLst>
     <p:sldId id="256" r:id="rId12"/>
@@ -27,6 +27,7 @@
     <p:sldId id="262" r:id="rId18"/>
     <p:sldId id="263" r:id="rId19"/>
     <p:sldId id="264" r:id="rId20"/>
+    <p:sldId id="265" r:id="rId21"/>
   </p:sldIdLst>
   <p:sldSz cx="12192000" cy="6858000"/>
   <p:notesSz cx="6858000" cy="9144000"/>
@@ -125,6 +126,11 @@
       </a:defRPr>
     </a:lvl9pPr>
   </p:defaultTextStyle>
+  <p:extLst>
+    <p:ext uri="{EFAFB233-063F-42B5-8137-9DF3F51BA10A}">
+      <p15:sldGuideLst xmlns:p15="http://schemas.microsoft.com/office/powerpoint/2012/main"/>
+    </p:ext>
+  </p:extLst>
 </p:presentation>
 </file>
 
@@ -11144,6 +11150,389 @@
         </p:sp>
       </p:grpSp>
     </p:spTree>
+  </p:cSld>
+  <p:clrMapOvr>
+    <a:masterClrMapping/>
+  </p:clrMapOvr>
+</p:sld>
+</file>
+
+<file path=ppt/slides/slide10.xml><?xml version="1.0" encoding="utf-8"?>
+<p:sld xmlns:a="http://schemas.openxmlformats.org/drawingml/2006/main" xmlns:r="http://schemas.openxmlformats.org/officeDocument/2006/relationships" xmlns:p="http://schemas.openxmlformats.org/presentationml/2006/main">
+  <p:cSld>
+    <p:spTree>
+      <p:nvGrpSpPr>
+        <p:cNvPr id="1" name=""/>
+        <p:cNvGrpSpPr/>
+        <p:nvPr/>
+      </p:nvGrpSpPr>
+      <p:grpSpPr>
+        <a:xfrm>
+          <a:off x="0" y="0"/>
+          <a:ext cx="0" cy="0"/>
+          <a:chOff x="0" y="0"/>
+          <a:chExt cx="0" cy="0"/>
+        </a:xfrm>
+      </p:grpSpPr>
+      <p:sp>
+        <p:nvSpPr>
+          <p:cNvPr id="25" name="Rectangle 24">
+            <a:extLst>
+              <a:ext uri="{FF2B5EF4-FFF2-40B4-BE49-F238E27FC236}">
+                <a16:creationId xmlns:a16="http://schemas.microsoft.com/office/drawing/2014/main" id="{23267C7F-AB7E-F4CE-B284-CB66ED5DE633}"/>
+              </a:ext>
+            </a:extLst>
+          </p:cNvPr>
+          <p:cNvSpPr/>
+          <p:nvPr/>
+        </p:nvSpPr>
+        <p:spPr>
+          <a:xfrm>
+            <a:off x="1231900" y="0"/>
+            <a:ext cx="9702800" cy="6858000"/>
+          </a:xfrm>
+          <a:prstGeom prst="rect">
+            <a:avLst/>
+          </a:prstGeom>
+          <a:solidFill>
+            <a:schemeClr val="bg1"/>
+          </a:solidFill>
+        </p:spPr>
+        <p:style>
+          <a:lnRef idx="2">
+            <a:schemeClr val="accent1">
+              <a:shade val="15000"/>
+            </a:schemeClr>
+          </a:lnRef>
+          <a:fillRef idx="1">
+            <a:schemeClr val="accent1"/>
+          </a:fillRef>
+          <a:effectRef idx="0">
+            <a:schemeClr val="accent1"/>
+          </a:effectRef>
+          <a:fontRef idx="minor">
+            <a:schemeClr val="lt1"/>
+          </a:fontRef>
+        </p:style>
+        <p:txBody>
+          <a:bodyPr rtlCol="0" anchor="ctr"/>
+          <a:lstStyle/>
+          <a:p>
+            <a:pPr algn="ctr"/>
+            <a:endParaRPr lang="nl-NL"/>
+          </a:p>
+        </p:txBody>
+      </p:sp>
+      <p:pic>
+        <p:nvPicPr>
+          <p:cNvPr id="7" name="Picture 6">
+            <a:extLst>
+              <a:ext uri="{FF2B5EF4-FFF2-40B4-BE49-F238E27FC236}">
+                <a16:creationId xmlns:a16="http://schemas.microsoft.com/office/drawing/2014/main" id="{B61AAF47-2883-70D8-8357-0190DB62FEB7}"/>
+              </a:ext>
+            </a:extLst>
+          </p:cNvPr>
+          <p:cNvPicPr>
+            <a:picLocks noChangeAspect="1"/>
+          </p:cNvPicPr>
+          <p:nvPr/>
+        </p:nvPicPr>
+        <p:blipFill>
+          <a:blip r:embed="rId2" cstate="print">
+            <a:extLst>
+              <a:ext uri="{28A0092B-C50C-407E-A947-70E740481C1C}">
+                <a14:useLocalDpi xmlns:a14="http://schemas.microsoft.com/office/drawing/2010/main" val="0"/>
+              </a:ext>
+            </a:extLst>
+          </a:blip>
+          <a:stretch>
+            <a:fillRect/>
+          </a:stretch>
+        </p:blipFill>
+        <p:spPr>
+          <a:xfrm>
+            <a:off x="3524250" y="0"/>
+            <a:ext cx="5143500" cy="6858000"/>
+          </a:xfrm>
+          <a:prstGeom prst="rect">
+            <a:avLst/>
+          </a:prstGeom>
+        </p:spPr>
+      </p:pic>
+      <p:sp>
+        <p:nvSpPr>
+          <p:cNvPr id="8" name="TextBox 7">
+            <a:extLst>
+              <a:ext uri="{FF2B5EF4-FFF2-40B4-BE49-F238E27FC236}">
+                <a16:creationId xmlns:a16="http://schemas.microsoft.com/office/drawing/2014/main" id="{20593324-9B98-1F07-4054-A5301D4936FB}"/>
+              </a:ext>
+            </a:extLst>
+          </p:cNvPr>
+          <p:cNvSpPr txBox="1"/>
+          <p:nvPr/>
+        </p:nvSpPr>
+        <p:spPr>
+          <a:xfrm>
+            <a:off x="1479690" y="1718416"/>
+            <a:ext cx="2107933" cy="369332"/>
+          </a:xfrm>
+          <a:prstGeom prst="rect">
+            <a:avLst/>
+          </a:prstGeom>
+          <a:noFill/>
+        </p:spPr>
+        <p:txBody>
+          <a:bodyPr wrap="square" rtlCol="0">
+            <a:spAutoFit/>
+          </a:bodyPr>
+          <a:lstStyle/>
+          <a:p>
+            <a:pPr algn="ctr"/>
+            <a:r>
+              <a:rPr lang="nl-BE">
+                <a:solidFill>
+                  <a:srgbClr val="FF0000"/>
+                </a:solidFill>
+              </a:rPr>
+              <a:t>Elektronenbron</a:t>
+            </a:r>
+            <a:endParaRPr lang="nl-NL">
+              <a:solidFill>
+                <a:srgbClr val="FF0000"/>
+              </a:solidFill>
+            </a:endParaRPr>
+          </a:p>
+        </p:txBody>
+      </p:sp>
+      <p:sp>
+        <p:nvSpPr>
+          <p:cNvPr id="9" name="TextBox 8">
+            <a:extLst>
+              <a:ext uri="{FF2B5EF4-FFF2-40B4-BE49-F238E27FC236}">
+                <a16:creationId xmlns:a16="http://schemas.microsoft.com/office/drawing/2014/main" id="{9E357AED-67C3-FB95-808A-B61A19402AE7}"/>
+              </a:ext>
+            </a:extLst>
+          </p:cNvPr>
+          <p:cNvSpPr txBox="1"/>
+          <p:nvPr/>
+        </p:nvSpPr>
+        <p:spPr>
+          <a:xfrm>
+            <a:off x="1416317" y="5834507"/>
+            <a:ext cx="2107933" cy="369332"/>
+          </a:xfrm>
+          <a:prstGeom prst="rect">
+            <a:avLst/>
+          </a:prstGeom>
+          <a:noFill/>
+        </p:spPr>
+        <p:txBody>
+          <a:bodyPr wrap="square" rtlCol="0">
+            <a:spAutoFit/>
+          </a:bodyPr>
+          <a:lstStyle/>
+          <a:p>
+            <a:pPr algn="ctr"/>
+            <a:r>
+              <a:rPr lang="nl-BE">
+                <a:solidFill>
+                  <a:srgbClr val="FF0000"/>
+                </a:solidFill>
+              </a:rPr>
+              <a:t>Elektronendetector</a:t>
+            </a:r>
+            <a:endParaRPr lang="nl-NL">
+              <a:solidFill>
+                <a:srgbClr val="FF0000"/>
+              </a:solidFill>
+            </a:endParaRPr>
+          </a:p>
+        </p:txBody>
+      </p:sp>
+      <p:sp>
+        <p:nvSpPr>
+          <p:cNvPr id="10" name="TextBox 9">
+            <a:extLst>
+              <a:ext uri="{FF2B5EF4-FFF2-40B4-BE49-F238E27FC236}">
+                <a16:creationId xmlns:a16="http://schemas.microsoft.com/office/drawing/2014/main" id="{0F233F13-67E6-134B-F6DD-4C96DC6F5D7A}"/>
+              </a:ext>
+            </a:extLst>
+          </p:cNvPr>
+          <p:cNvSpPr txBox="1"/>
+          <p:nvPr/>
+        </p:nvSpPr>
+        <p:spPr>
+          <a:xfrm>
+            <a:off x="1416316" y="3152001"/>
+            <a:ext cx="2107933" cy="369332"/>
+          </a:xfrm>
+          <a:prstGeom prst="rect">
+            <a:avLst/>
+          </a:prstGeom>
+          <a:noFill/>
+        </p:spPr>
+        <p:txBody>
+          <a:bodyPr wrap="square" rtlCol="0">
+            <a:spAutoFit/>
+          </a:bodyPr>
+          <a:lstStyle/>
+          <a:p>
+            <a:pPr algn="ctr"/>
+            <a:r>
+              <a:rPr lang="nl-BE">
+                <a:solidFill>
+                  <a:srgbClr val="FF0000"/>
+                </a:solidFill>
+              </a:rPr>
+              <a:t>Lensplatform</a:t>
+            </a:r>
+            <a:endParaRPr lang="nl-NL">
+              <a:solidFill>
+                <a:srgbClr val="FF0000"/>
+              </a:solidFill>
+            </a:endParaRPr>
+          </a:p>
+        </p:txBody>
+      </p:sp>
+      <p:cxnSp>
+        <p:nvCxnSpPr>
+          <p:cNvPr id="15" name="Straight Arrow Connector 14">
+            <a:extLst>
+              <a:ext uri="{FF2B5EF4-FFF2-40B4-BE49-F238E27FC236}">
+                <a16:creationId xmlns:a16="http://schemas.microsoft.com/office/drawing/2014/main" id="{DA76E47F-94A2-2E2E-645B-5382EE340867}"/>
+              </a:ext>
+            </a:extLst>
+          </p:cNvPr>
+          <p:cNvCxnSpPr>
+            <a:cxnSpLocks/>
+            <a:stCxn id="10" idx="3"/>
+          </p:cNvCxnSpPr>
+          <p:nvPr/>
+        </p:nvCxnSpPr>
+        <p:spPr>
+          <a:xfrm>
+            <a:off x="3524249" y="3336667"/>
+            <a:ext cx="1762975" cy="0"/>
+          </a:xfrm>
+          <a:prstGeom prst="straightConnector1">
+            <a:avLst/>
+          </a:prstGeom>
+          <a:ln w="38100">
+            <a:solidFill>
+              <a:srgbClr val="FF0000"/>
+            </a:solidFill>
+            <a:tailEnd type="triangle"/>
+          </a:ln>
+        </p:spPr>
+        <p:style>
+          <a:lnRef idx="1">
+            <a:schemeClr val="accent1"/>
+          </a:lnRef>
+          <a:fillRef idx="0">
+            <a:schemeClr val="accent1"/>
+          </a:fillRef>
+          <a:effectRef idx="0">
+            <a:schemeClr val="accent1"/>
+          </a:effectRef>
+          <a:fontRef idx="minor">
+            <a:schemeClr val="tx1"/>
+          </a:fontRef>
+        </p:style>
+      </p:cxnSp>
+      <p:cxnSp>
+        <p:nvCxnSpPr>
+          <p:cNvPr id="18" name="Straight Arrow Connector 17">
+            <a:extLst>
+              <a:ext uri="{FF2B5EF4-FFF2-40B4-BE49-F238E27FC236}">
+                <a16:creationId xmlns:a16="http://schemas.microsoft.com/office/drawing/2014/main" id="{3C1731A6-BFF4-3E6D-CD70-7A21A02EC9F8}"/>
+              </a:ext>
+            </a:extLst>
+          </p:cNvPr>
+          <p:cNvCxnSpPr>
+            <a:cxnSpLocks/>
+          </p:cNvCxnSpPr>
+          <p:nvPr/>
+        </p:nvCxnSpPr>
+        <p:spPr>
+          <a:xfrm>
+            <a:off x="3518693" y="1903082"/>
+            <a:ext cx="2239311" cy="0"/>
+          </a:xfrm>
+          <a:prstGeom prst="straightConnector1">
+            <a:avLst/>
+          </a:prstGeom>
+          <a:ln w="38100">
+            <a:solidFill>
+              <a:srgbClr val="FF0000"/>
+            </a:solidFill>
+            <a:tailEnd type="triangle"/>
+          </a:ln>
+        </p:spPr>
+        <p:style>
+          <a:lnRef idx="1">
+            <a:schemeClr val="accent1"/>
+          </a:lnRef>
+          <a:fillRef idx="0">
+            <a:schemeClr val="accent1"/>
+          </a:fillRef>
+          <a:effectRef idx="0">
+            <a:schemeClr val="accent1"/>
+          </a:effectRef>
+          <a:fontRef idx="minor">
+            <a:schemeClr val="tx1"/>
+          </a:fontRef>
+        </p:style>
+      </p:cxnSp>
+      <p:cxnSp>
+        <p:nvCxnSpPr>
+          <p:cNvPr id="21" name="Straight Arrow Connector 20">
+            <a:extLst>
+              <a:ext uri="{FF2B5EF4-FFF2-40B4-BE49-F238E27FC236}">
+                <a16:creationId xmlns:a16="http://schemas.microsoft.com/office/drawing/2014/main" id="{CEC557C5-AC18-359F-902A-6F244AD69166}"/>
+              </a:ext>
+            </a:extLst>
+          </p:cNvPr>
+          <p:cNvCxnSpPr>
+            <a:cxnSpLocks/>
+          </p:cNvCxnSpPr>
+          <p:nvPr/>
+        </p:nvCxnSpPr>
+        <p:spPr>
+          <a:xfrm>
+            <a:off x="3524248" y="6019172"/>
+            <a:ext cx="2315237" cy="0"/>
+          </a:xfrm>
+          <a:prstGeom prst="straightConnector1">
+            <a:avLst/>
+          </a:prstGeom>
+          <a:ln w="38100">
+            <a:solidFill>
+              <a:srgbClr val="FF0000"/>
+            </a:solidFill>
+            <a:tailEnd type="triangle"/>
+          </a:ln>
+        </p:spPr>
+        <p:style>
+          <a:lnRef idx="1">
+            <a:schemeClr val="accent1"/>
+          </a:lnRef>
+          <a:fillRef idx="0">
+            <a:schemeClr val="accent1"/>
+          </a:fillRef>
+          <a:effectRef idx="0">
+            <a:schemeClr val="accent1"/>
+          </a:effectRef>
+          <a:fontRef idx="minor">
+            <a:schemeClr val="tx1"/>
+          </a:fontRef>
+        </p:style>
+      </p:cxnSp>
+    </p:spTree>
+    <p:extLst>
+      <p:ext uri="{BB962C8B-B14F-4D97-AF65-F5344CB8AC3E}">
+        <p14:creationId xmlns:p14="http://schemas.microsoft.com/office/powerpoint/2010/main" val="3064703264"/>
+      </p:ext>
+    </p:extLst>
   </p:cSld>
   <p:clrMapOvr>
     <a:masterClrMapping/>
